--- a/アイコン作成.pptx
+++ b/アイコン作成.pptx
@@ -104,6 +104,11 @@
       </a:defRPr>
     </a:lvl9pPr>
   </p:defaultTextStyle>
+  <p:extLst>
+    <p:ext uri="{EFAFB233-063F-42B5-8137-9DF3F51BA10A}">
+      <p15:sldGuideLst xmlns:p15="http://schemas.microsoft.com/office/powerpoint/2012/main"/>
+    </p:ext>
+  </p:extLst>
 </p:presentation>
 </file>
 
@@ -254,7 +259,7 @@
           <a:p>
             <a:fld id="{1271BD87-DAA7-4386-9D7B-95369EC0824A}" type="datetimeFigureOut">
               <a:rPr kumimoji="1" lang="ja-JP" altLang="en-US" smtClean="0"/>
-              <a:t>2025/11/5</a:t>
+              <a:t>2025/11/9</a:t>
             </a:fld>
             <a:endParaRPr kumimoji="1" lang="ja-JP" altLang="en-US"/>
           </a:p>
@@ -484,7 +489,7 @@
           <a:p>
             <a:fld id="{1271BD87-DAA7-4386-9D7B-95369EC0824A}" type="datetimeFigureOut">
               <a:rPr kumimoji="1" lang="ja-JP" altLang="en-US" smtClean="0"/>
-              <a:t>2025/11/5</a:t>
+              <a:t>2025/11/9</a:t>
             </a:fld>
             <a:endParaRPr kumimoji="1" lang="ja-JP" altLang="en-US"/>
           </a:p>
@@ -724,7 +729,7 @@
           <a:p>
             <a:fld id="{1271BD87-DAA7-4386-9D7B-95369EC0824A}" type="datetimeFigureOut">
               <a:rPr kumimoji="1" lang="ja-JP" altLang="en-US" smtClean="0"/>
-              <a:t>2025/11/5</a:t>
+              <a:t>2025/11/9</a:t>
             </a:fld>
             <a:endParaRPr kumimoji="1" lang="ja-JP" altLang="en-US"/>
           </a:p>
@@ -954,7 +959,7 @@
           <a:p>
             <a:fld id="{1271BD87-DAA7-4386-9D7B-95369EC0824A}" type="datetimeFigureOut">
               <a:rPr kumimoji="1" lang="ja-JP" altLang="en-US" smtClean="0"/>
-              <a:t>2025/11/5</a:t>
+              <a:t>2025/11/9</a:t>
             </a:fld>
             <a:endParaRPr kumimoji="1" lang="ja-JP" altLang="en-US"/>
           </a:p>
@@ -1229,7 +1234,7 @@
           <a:p>
             <a:fld id="{1271BD87-DAA7-4386-9D7B-95369EC0824A}" type="datetimeFigureOut">
               <a:rPr kumimoji="1" lang="ja-JP" altLang="en-US" smtClean="0"/>
-              <a:t>2025/11/5</a:t>
+              <a:t>2025/11/9</a:t>
             </a:fld>
             <a:endParaRPr kumimoji="1" lang="ja-JP" altLang="en-US"/>
           </a:p>
@@ -1558,7 +1563,7 @@
           <a:p>
             <a:fld id="{1271BD87-DAA7-4386-9D7B-95369EC0824A}" type="datetimeFigureOut">
               <a:rPr kumimoji="1" lang="ja-JP" altLang="en-US" smtClean="0"/>
-              <a:t>2025/11/5</a:t>
+              <a:t>2025/11/9</a:t>
             </a:fld>
             <a:endParaRPr kumimoji="1" lang="ja-JP" altLang="en-US"/>
           </a:p>
@@ -2034,7 +2039,7 @@
           <a:p>
             <a:fld id="{1271BD87-DAA7-4386-9D7B-95369EC0824A}" type="datetimeFigureOut">
               <a:rPr kumimoji="1" lang="ja-JP" altLang="en-US" smtClean="0"/>
-              <a:t>2025/11/5</a:t>
+              <a:t>2025/11/9</a:t>
             </a:fld>
             <a:endParaRPr kumimoji="1" lang="ja-JP" altLang="en-US"/>
           </a:p>
@@ -2175,7 +2180,7 @@
           <a:p>
             <a:fld id="{1271BD87-DAA7-4386-9D7B-95369EC0824A}" type="datetimeFigureOut">
               <a:rPr kumimoji="1" lang="ja-JP" altLang="en-US" smtClean="0"/>
-              <a:t>2025/11/5</a:t>
+              <a:t>2025/11/9</a:t>
             </a:fld>
             <a:endParaRPr kumimoji="1" lang="ja-JP" altLang="en-US"/>
           </a:p>
@@ -2288,7 +2293,7 @@
           <a:p>
             <a:fld id="{1271BD87-DAA7-4386-9D7B-95369EC0824A}" type="datetimeFigureOut">
               <a:rPr kumimoji="1" lang="ja-JP" altLang="en-US" smtClean="0"/>
-              <a:t>2025/11/5</a:t>
+              <a:t>2025/11/9</a:t>
             </a:fld>
             <a:endParaRPr kumimoji="1" lang="ja-JP" altLang="en-US"/>
           </a:p>
@@ -2631,7 +2636,7 @@
           <a:p>
             <a:fld id="{1271BD87-DAA7-4386-9D7B-95369EC0824A}" type="datetimeFigureOut">
               <a:rPr kumimoji="1" lang="ja-JP" altLang="en-US" smtClean="0"/>
-              <a:t>2025/11/5</a:t>
+              <a:t>2025/11/9</a:t>
             </a:fld>
             <a:endParaRPr kumimoji="1" lang="ja-JP" altLang="en-US"/>
           </a:p>
@@ -2919,7 +2924,7 @@
           <a:p>
             <a:fld id="{1271BD87-DAA7-4386-9D7B-95369EC0824A}" type="datetimeFigureOut">
               <a:rPr kumimoji="1" lang="ja-JP" altLang="en-US" smtClean="0"/>
-              <a:t>2025/11/5</a:t>
+              <a:t>2025/11/9</a:t>
             </a:fld>
             <a:endParaRPr kumimoji="1" lang="ja-JP" altLang="en-US"/>
           </a:p>
@@ -3192,7 +3197,7 @@
           <a:p>
             <a:fld id="{1271BD87-DAA7-4386-9D7B-95369EC0824A}" type="datetimeFigureOut">
               <a:rPr kumimoji="1" lang="ja-JP" altLang="en-US" smtClean="0"/>
-              <a:t>2025/11/5</a:t>
+              <a:t>2025/11/9</a:t>
             </a:fld>
             <a:endParaRPr kumimoji="1" lang="ja-JP" altLang="en-US"/>
           </a:p>
@@ -3609,6 +3614,78 @@
           <a:chExt cx="0" cy="0"/>
         </a:xfrm>
       </p:grpSpPr>
+      <p:pic>
+        <p:nvPicPr>
+          <p:cNvPr id="36" name="図 35">
+            <a:extLst>
+              <a:ext uri="{FF2B5EF4-FFF2-40B4-BE49-F238E27FC236}">
+                <a16:creationId xmlns:a16="http://schemas.microsoft.com/office/drawing/2014/main" id="{BFEDD8B5-3372-5466-B991-6DD48A103E9F}"/>
+              </a:ext>
+            </a:extLst>
+          </p:cNvPr>
+          <p:cNvPicPr>
+            <a:picLocks noChangeAspect="1"/>
+          </p:cNvPicPr>
+          <p:nvPr/>
+        </p:nvPicPr>
+        <p:blipFill>
+          <a:blip r:embed="rId2">
+            <a:extLst>
+              <a:ext uri="{28A0092B-C50C-407E-A947-70E740481C1C}">
+                <a14:useLocalDpi xmlns:a14="http://schemas.microsoft.com/office/drawing/2010/main" val="0"/>
+              </a:ext>
+            </a:extLst>
+          </a:blip>
+          <a:stretch>
+            <a:fillRect/>
+          </a:stretch>
+        </p:blipFill>
+        <p:spPr>
+          <a:xfrm>
+            <a:off x="8071275" y="3200663"/>
+            <a:ext cx="2438611" cy="2438611"/>
+          </a:xfrm>
+          <a:prstGeom prst="rect">
+            <a:avLst/>
+          </a:prstGeom>
+        </p:spPr>
+      </p:pic>
+      <p:pic>
+        <p:nvPicPr>
+          <p:cNvPr id="27" name="図 26">
+            <a:extLst>
+              <a:ext uri="{FF2B5EF4-FFF2-40B4-BE49-F238E27FC236}">
+                <a16:creationId xmlns:a16="http://schemas.microsoft.com/office/drawing/2014/main" id="{43FF6F49-CD72-FFFD-185C-13867C2DDE97}"/>
+              </a:ext>
+            </a:extLst>
+          </p:cNvPr>
+          <p:cNvPicPr>
+            <a:picLocks noChangeAspect="1"/>
+          </p:cNvPicPr>
+          <p:nvPr/>
+        </p:nvPicPr>
+        <p:blipFill>
+          <a:blip r:embed="rId3">
+            <a:extLst>
+              <a:ext uri="{28A0092B-C50C-407E-A947-70E740481C1C}">
+                <a14:useLocalDpi xmlns:a14="http://schemas.microsoft.com/office/drawing/2010/main" val="0"/>
+              </a:ext>
+            </a:extLst>
+          </a:blip>
+          <a:stretch>
+            <a:fillRect/>
+          </a:stretch>
+        </p:blipFill>
+        <p:spPr>
+          <a:xfrm>
+            <a:off x="9865360" y="3578826"/>
+            <a:ext cx="2438611" cy="2438611"/>
+          </a:xfrm>
+          <a:prstGeom prst="rect">
+            <a:avLst/>
+          </a:prstGeom>
+        </p:spPr>
+      </p:pic>
       <p:sp>
         <p:nvSpPr>
           <p:cNvPr id="4" name="正方形/長方形 3">
@@ -3623,14 +3700,14 @@
         </p:nvSpPr>
         <p:spPr>
           <a:xfrm>
-            <a:off x="1569346" y="2359627"/>
+            <a:off x="3594849" y="4085008"/>
             <a:ext cx="2438399" cy="2438399"/>
           </a:xfrm>
           <a:prstGeom prst="rect">
             <a:avLst/>
           </a:prstGeom>
           <a:blipFill dpi="0" rotWithShape="1">
-            <a:blip r:embed="rId2">
+            <a:blip r:embed="rId4">
               <a:alphaModFix amt="28000"/>
             </a:blip>
             <a:srcRect/>
@@ -3679,7 +3756,7 @@
           <p:nvPr/>
         </p:nvPicPr>
         <p:blipFill>
-          <a:blip r:embed="rId3">
+          <a:blip r:embed="rId5">
             <a:extLst>
               <a:ext uri="{28A0092B-C50C-407E-A947-70E740481C1C}">
                 <a14:useLocalDpi xmlns:a14="http://schemas.microsoft.com/office/drawing/2010/main" val="0"/>
@@ -3702,10 +3779,10 @@
       </p:pic>
       <p:pic>
         <p:nvPicPr>
-          <p:cNvPr id="6" name="図 5">
-            <a:extLst>
-              <a:ext uri="{FF2B5EF4-FFF2-40B4-BE49-F238E27FC236}">
-                <a16:creationId xmlns:a16="http://schemas.microsoft.com/office/drawing/2014/main" id="{4B7B5AA0-4908-8D81-81E3-285C3137F642}"/>
+          <p:cNvPr id="13" name="図 12">
+            <a:extLst>
+              <a:ext uri="{FF2B5EF4-FFF2-40B4-BE49-F238E27FC236}">
+                <a16:creationId xmlns:a16="http://schemas.microsoft.com/office/drawing/2014/main" id="{0315A59D-519D-2D50-E1E2-C4867EF86F0F}"/>
               </a:ext>
             </a:extLst>
           </p:cNvPr>
@@ -3715,7 +3792,7 @@
           <p:nvPr/>
         </p:nvPicPr>
         <p:blipFill>
-          <a:blip r:embed="rId2">
+          <a:blip r:embed="rId6">
             <a:extLst>
               <a:ext uri="{28A0092B-C50C-407E-A947-70E740481C1C}">
                 <a14:useLocalDpi xmlns:a14="http://schemas.microsoft.com/office/drawing/2010/main" val="0"/>
@@ -3728,8 +3805,8 @@
         </p:blipFill>
         <p:spPr>
           <a:xfrm>
-            <a:off x="8562340" y="4336673"/>
-            <a:ext cx="1678387" cy="1678387"/>
+            <a:off x="3594849" y="1592809"/>
+            <a:ext cx="1294581" cy="1294581"/>
           </a:xfrm>
           <a:prstGeom prst="rect">
             <a:avLst/>
@@ -3738,10 +3815,10 @@
       </p:pic>
       <p:pic>
         <p:nvPicPr>
-          <p:cNvPr id="13" name="図 12">
-            <a:extLst>
-              <a:ext uri="{FF2B5EF4-FFF2-40B4-BE49-F238E27FC236}">
-                <a16:creationId xmlns:a16="http://schemas.microsoft.com/office/drawing/2014/main" id="{0315A59D-519D-2D50-E1E2-C4867EF86F0F}"/>
+          <p:cNvPr id="6" name="図 5">
+            <a:extLst>
+              <a:ext uri="{FF2B5EF4-FFF2-40B4-BE49-F238E27FC236}">
+                <a16:creationId xmlns:a16="http://schemas.microsoft.com/office/drawing/2014/main" id="{4B7B5AA0-4908-8D81-81E3-285C3137F642}"/>
               </a:ext>
             </a:extLst>
           </p:cNvPr>
@@ -3764,7 +3841,175 @@
         </p:blipFill>
         <p:spPr>
           <a:xfrm>
-            <a:off x="3390262" y="716932"/>
+            <a:off x="1710313" y="4841685"/>
+            <a:ext cx="1411869" cy="1411869"/>
+          </a:xfrm>
+          <a:prstGeom prst="rect">
+            <a:avLst/>
+          </a:prstGeom>
+        </p:spPr>
+      </p:pic>
+      <p:grpSp>
+        <p:nvGrpSpPr>
+          <p:cNvPr id="29" name="グループ化 28">
+            <a:extLst>
+              <a:ext uri="{FF2B5EF4-FFF2-40B4-BE49-F238E27FC236}">
+                <a16:creationId xmlns:a16="http://schemas.microsoft.com/office/drawing/2014/main" id="{FD52526F-142A-5CEE-C8EC-319DB7AC7E59}"/>
+              </a:ext>
+            </a:extLst>
+          </p:cNvPr>
+          <p:cNvGrpSpPr/>
+          <p:nvPr/>
+        </p:nvGrpSpPr>
+        <p:grpSpPr>
+          <a:xfrm>
+            <a:off x="9510165" y="542928"/>
+            <a:ext cx="1294581" cy="1294581"/>
+            <a:chOff x="5448705" y="1915831"/>
+            <a:chExt cx="1294581" cy="1294581"/>
+          </a:xfrm>
+        </p:grpSpPr>
+        <p:pic>
+          <p:nvPicPr>
+            <p:cNvPr id="3" name="図 2">
+              <a:extLst>
+                <a:ext uri="{FF2B5EF4-FFF2-40B4-BE49-F238E27FC236}">
+                  <a16:creationId xmlns:a16="http://schemas.microsoft.com/office/drawing/2014/main" id="{02E0FF2C-6025-EFDD-C2C9-21689B34BAEE}"/>
+                </a:ext>
+              </a:extLst>
+            </p:cNvPr>
+            <p:cNvPicPr>
+              <a:picLocks noChangeAspect="1"/>
+            </p:cNvPicPr>
+            <p:nvPr/>
+          </p:nvPicPr>
+          <p:blipFill>
+            <a:blip r:embed="rId7">
+              <a:extLst>
+                <a:ext uri="{28A0092B-C50C-407E-A947-70E740481C1C}">
+                  <a14:useLocalDpi xmlns:a14="http://schemas.microsoft.com/office/drawing/2010/main" val="0"/>
+                </a:ext>
+              </a:extLst>
+            </a:blip>
+            <a:srcRect b="49904"/>
+            <a:stretch>
+              <a:fillRect/>
+            </a:stretch>
+          </p:blipFill>
+          <p:spPr>
+            <a:xfrm>
+              <a:off x="5448705" y="1915832"/>
+              <a:ext cx="1294581" cy="648537"/>
+            </a:xfrm>
+            <a:prstGeom prst="rect">
+              <a:avLst/>
+            </a:prstGeom>
+          </p:spPr>
+        </p:pic>
+        <p:pic>
+          <p:nvPicPr>
+            <p:cNvPr id="5" name="図 4">
+              <a:extLst>
+                <a:ext uri="{FF2B5EF4-FFF2-40B4-BE49-F238E27FC236}">
+                  <a16:creationId xmlns:a16="http://schemas.microsoft.com/office/drawing/2014/main" id="{13247FD1-96A2-1360-CB27-13821405B95F}"/>
+                </a:ext>
+              </a:extLst>
+            </p:cNvPr>
+            <p:cNvPicPr>
+              <a:picLocks noChangeAspect="1"/>
+            </p:cNvPicPr>
+            <p:nvPr/>
+          </p:nvPicPr>
+          <p:blipFill>
+            <a:blip r:embed="rId7">
+              <a:extLst>
+                <a:ext uri="{28A0092B-C50C-407E-A947-70E740481C1C}">
+                  <a14:useLocalDpi xmlns:a14="http://schemas.microsoft.com/office/drawing/2010/main" val="0"/>
+                </a:ext>
+              </a:extLst>
+            </a:blip>
+            <a:srcRect t="1" r="50055" b="1"/>
+            <a:stretch>
+              <a:fillRect/>
+            </a:stretch>
+          </p:blipFill>
+          <p:spPr>
+            <a:xfrm>
+              <a:off x="5448705" y="1915831"/>
+              <a:ext cx="646575" cy="1294581"/>
+            </a:xfrm>
+            <a:prstGeom prst="rect">
+              <a:avLst/>
+            </a:prstGeom>
+          </p:spPr>
+        </p:pic>
+        <p:pic>
+          <p:nvPicPr>
+            <p:cNvPr id="7" name="図 6">
+              <a:extLst>
+                <a:ext uri="{FF2B5EF4-FFF2-40B4-BE49-F238E27FC236}">
+                  <a16:creationId xmlns:a16="http://schemas.microsoft.com/office/drawing/2014/main" id="{E4C72AC9-694B-9B80-A41E-FDFE9F93C62D}"/>
+                </a:ext>
+              </a:extLst>
+            </p:cNvPr>
+            <p:cNvPicPr>
+              <a:picLocks noChangeAspect="1"/>
+            </p:cNvPicPr>
+            <p:nvPr/>
+          </p:nvPicPr>
+          <p:blipFill>
+            <a:blip r:embed="rId7">
+              <a:extLst>
+                <a:ext uri="{28A0092B-C50C-407E-A947-70E740481C1C}">
+                  <a14:useLocalDpi xmlns:a14="http://schemas.microsoft.com/office/drawing/2010/main" val="0"/>
+                </a:ext>
+              </a:extLst>
+            </a:blip>
+            <a:srcRect l="27437" t="28104" r="22776" b="36336"/>
+            <a:stretch>
+              <a:fillRect/>
+            </a:stretch>
+          </p:blipFill>
+          <p:spPr>
+            <a:xfrm>
+              <a:off x="5803900" y="2279650"/>
+              <a:ext cx="644526" cy="460354"/>
+            </a:xfrm>
+            <a:prstGeom prst="rect">
+              <a:avLst/>
+            </a:prstGeom>
+          </p:spPr>
+        </p:pic>
+      </p:grpSp>
+      <p:pic>
+        <p:nvPicPr>
+          <p:cNvPr id="28" name="図 27">
+            <a:extLst>
+              <a:ext uri="{FF2B5EF4-FFF2-40B4-BE49-F238E27FC236}">
+                <a16:creationId xmlns:a16="http://schemas.microsoft.com/office/drawing/2014/main" id="{86936CED-1053-9811-C129-86F1487676A0}"/>
+              </a:ext>
+            </a:extLst>
+          </p:cNvPr>
+          <p:cNvPicPr>
+            <a:picLocks noChangeAspect="1"/>
+          </p:cNvPicPr>
+          <p:nvPr/>
+        </p:nvPicPr>
+        <p:blipFill>
+          <a:blip r:embed="rId8">
+            <a:extLst>
+              <a:ext uri="{28A0092B-C50C-407E-A947-70E740481C1C}">
+                <a14:useLocalDpi xmlns:a14="http://schemas.microsoft.com/office/drawing/2010/main" val="0"/>
+              </a:ext>
+            </a:extLst>
+          </a:blip>
+          <a:stretch>
+            <a:fillRect/>
+          </a:stretch>
+        </p:blipFill>
+        <p:spPr>
+          <a:xfrm>
+            <a:off x="2713165" y="2682829"/>
             <a:ext cx="1294581" cy="1294581"/>
           </a:xfrm>
           <a:prstGeom prst="rect">
@@ -3774,10 +4019,10 @@
       </p:pic>
       <p:grpSp>
         <p:nvGrpSpPr>
-          <p:cNvPr id="29" name="グループ化 28">
-            <a:extLst>
-              <a:ext uri="{FF2B5EF4-FFF2-40B4-BE49-F238E27FC236}">
-                <a16:creationId xmlns:a16="http://schemas.microsoft.com/office/drawing/2014/main" id="{254C6DDE-B54C-1EA7-9CA5-155E08C2DCBA}"/>
+          <p:cNvPr id="40" name="グループ化 39">
+            <a:extLst>
+              <a:ext uri="{FF2B5EF4-FFF2-40B4-BE49-F238E27FC236}">
+                <a16:creationId xmlns:a16="http://schemas.microsoft.com/office/drawing/2014/main" id="{50CC3E41-58BE-D982-71EE-EA9DB60433EA}"/>
               </a:ext>
             </a:extLst>
           </p:cNvPr>
@@ -3794,10 +4039,10 @@
         </p:grpSpPr>
         <p:pic>
           <p:nvPicPr>
-            <p:cNvPr id="28" name="図 27">
+            <p:cNvPr id="39" name="図 38">
               <a:extLst>
                 <a:ext uri="{FF2B5EF4-FFF2-40B4-BE49-F238E27FC236}">
-                  <a16:creationId xmlns:a16="http://schemas.microsoft.com/office/drawing/2014/main" id="{86936CED-1053-9811-C129-86F1487676A0}"/>
+                  <a16:creationId xmlns:a16="http://schemas.microsoft.com/office/drawing/2014/main" id="{F676F958-56F3-243B-A52B-F6B746D05D5B}"/>
                 </a:ext>
               </a:extLst>
             </p:cNvPr>
@@ -3807,7 +4052,7 @@
             <p:nvPr/>
           </p:nvPicPr>
           <p:blipFill>
-            <a:blip r:embed="rId5">
+            <a:blip r:embed="rId9">
               <a:extLst>
                 <a:ext uri="{28A0092B-C50C-407E-A947-70E740481C1C}">
                   <a14:useLocalDpi xmlns:a14="http://schemas.microsoft.com/office/drawing/2010/main" val="0"/>
@@ -3820,8 +4065,8 @@
           </p:blipFill>
           <p:spPr>
             <a:xfrm>
-              <a:off x="5448707" y="1915833"/>
-              <a:ext cx="1294581" cy="1294581"/>
+              <a:off x="6096000" y="2562610"/>
+              <a:ext cx="1414800" cy="1414800"/>
             </a:xfrm>
             <a:prstGeom prst="rect">
               <a:avLst/>
@@ -3830,10 +4075,10 @@
         </p:pic>
         <p:pic>
           <p:nvPicPr>
-            <p:cNvPr id="26" name="図 25">
+            <p:cNvPr id="11" name="図 10">
               <a:extLst>
                 <a:ext uri="{FF2B5EF4-FFF2-40B4-BE49-F238E27FC236}">
-                  <a16:creationId xmlns:a16="http://schemas.microsoft.com/office/drawing/2014/main" id="{27992559-FDF7-26A6-3B60-60AB66A925F6}"/>
+                  <a16:creationId xmlns:a16="http://schemas.microsoft.com/office/drawing/2014/main" id="{2D10F1D5-B216-1E80-C41F-A83DA43BA4F7}"/>
                 </a:ext>
               </a:extLst>
             </p:cNvPr>
@@ -3843,7 +4088,7 @@
             <p:nvPr/>
           </p:nvPicPr>
           <p:blipFill>
-            <a:blip r:embed="rId6">
+            <a:blip r:embed="rId10">
               <a:extLst>
                 <a:ext uri="{28A0092B-C50C-407E-A947-70E740481C1C}">
                   <a14:useLocalDpi xmlns:a14="http://schemas.microsoft.com/office/drawing/2010/main" val="0"/>
@@ -3856,8 +4101,8 @@
           </p:blipFill>
           <p:spPr>
             <a:xfrm>
-              <a:off x="6095285" y="2564372"/>
-              <a:ext cx="1411867" cy="1411867"/>
+              <a:off x="5444115" y="1918691"/>
+              <a:ext cx="1294581" cy="1294581"/>
             </a:xfrm>
             <a:prstGeom prst="rect">
               <a:avLst/>
@@ -3979,11 +4224,11 @@
             <p:nvPr/>
           </p:nvPicPr>
           <p:blipFill>
-            <a:blip r:embed="rId7">
+            <a:blip r:embed="rId11">
               <a:extLst>
                 <a:ext uri="{BEBA8EAE-BF5A-486C-A8C5-ECC9F3942E4B}">
                   <a14:imgProps xmlns:a14="http://schemas.microsoft.com/office/drawing/2010/main">
-                    <a14:imgLayer r:embed="rId8">
+                    <a14:imgLayer r:embed="rId12">
                       <a14:imgEffect>
                         <a14:sharpenSoften amount="-100000"/>
                       </a14:imgEffect>
@@ -4015,6 +4260,178 @@
             </a:prstGeom>
           </p:spPr>
         </p:pic>
+      </p:grpSp>
+      <p:sp>
+        <p:nvSpPr>
+          <p:cNvPr id="42" name="正方形/長方形 41">
+            <a:extLst>
+              <a:ext uri="{FF2B5EF4-FFF2-40B4-BE49-F238E27FC236}">
+                <a16:creationId xmlns:a16="http://schemas.microsoft.com/office/drawing/2014/main" id="{2FFB0812-1CCE-813C-18B1-C40136FBF2A1}"/>
+              </a:ext>
+            </a:extLst>
+          </p:cNvPr>
+          <p:cNvSpPr/>
+          <p:nvPr/>
+        </p:nvSpPr>
+        <p:spPr>
+          <a:xfrm>
+            <a:off x="2615564" y="826426"/>
+            <a:ext cx="914400" cy="914400"/>
+          </a:xfrm>
+          <a:prstGeom prst="rect">
+            <a:avLst/>
+          </a:prstGeom>
+          <a:solidFill>
+            <a:srgbClr val="00CC32"/>
+          </a:solidFill>
+        </p:spPr>
+        <p:style>
+          <a:lnRef idx="2">
+            <a:schemeClr val="accent1">
+              <a:shade val="15000"/>
+            </a:schemeClr>
+          </a:lnRef>
+          <a:fillRef idx="1">
+            <a:schemeClr val="accent1"/>
+          </a:fillRef>
+          <a:effectRef idx="0">
+            <a:schemeClr val="accent1"/>
+          </a:effectRef>
+          <a:fontRef idx="minor">
+            <a:schemeClr val="lt1"/>
+          </a:fontRef>
+        </p:style>
+        <p:txBody>
+          <a:bodyPr rtlCol="0" anchor="ctr"/>
+          <a:lstStyle/>
+          <a:p>
+            <a:pPr algn="ctr"/>
+            <a:endParaRPr kumimoji="1" lang="ja-JP" altLang="en-US"/>
+          </a:p>
+        </p:txBody>
+      </p:sp>
+      <p:grpSp>
+        <p:nvGrpSpPr>
+          <p:cNvPr id="19" name="グループ化 18">
+            <a:extLst>
+              <a:ext uri="{FF2B5EF4-FFF2-40B4-BE49-F238E27FC236}">
+                <a16:creationId xmlns:a16="http://schemas.microsoft.com/office/drawing/2014/main" id="{0BE8705C-668A-AE8F-EFF5-C70213AAEA30}"/>
+              </a:ext>
+            </a:extLst>
+          </p:cNvPr>
+          <p:cNvGrpSpPr/>
+          <p:nvPr/>
+        </p:nvGrpSpPr>
+        <p:grpSpPr>
+          <a:xfrm>
+            <a:off x="6914058" y="5050573"/>
+            <a:ext cx="507267" cy="507267"/>
+            <a:chOff x="5833062" y="3977410"/>
+            <a:chExt cx="2438399" cy="2438399"/>
+          </a:xfrm>
+        </p:grpSpPr>
+        <p:sp>
+          <p:nvSpPr>
+            <p:cNvPr id="2" name="楕円 1">
+              <a:extLst>
+                <a:ext uri="{FF2B5EF4-FFF2-40B4-BE49-F238E27FC236}">
+                  <a16:creationId xmlns:a16="http://schemas.microsoft.com/office/drawing/2014/main" id="{66B9E798-8D5E-26D3-2E63-05F1C085A321}"/>
+                </a:ext>
+              </a:extLst>
+            </p:cNvPr>
+            <p:cNvSpPr/>
+            <p:nvPr/>
+          </p:nvSpPr>
+          <p:spPr>
+            <a:xfrm>
+              <a:off x="5833062" y="3977410"/>
+              <a:ext cx="2438399" cy="2438399"/>
+            </a:xfrm>
+            <a:prstGeom prst="ellipse">
+              <a:avLst/>
+            </a:prstGeom>
+            <a:solidFill>
+              <a:schemeClr val="bg1">
+                <a:alpha val="70000"/>
+              </a:schemeClr>
+            </a:solidFill>
+            <a:ln w="15875">
+              <a:solidFill>
+                <a:schemeClr val="tx1"/>
+              </a:solidFill>
+              <a:tailEnd type="arrow"/>
+            </a:ln>
+          </p:spPr>
+          <p:style>
+            <a:lnRef idx="2">
+              <a:schemeClr val="accent1">
+                <a:shade val="15000"/>
+              </a:schemeClr>
+            </a:lnRef>
+            <a:fillRef idx="1">
+              <a:schemeClr val="accent1"/>
+            </a:fillRef>
+            <a:effectRef idx="0">
+              <a:schemeClr val="accent1"/>
+            </a:effectRef>
+            <a:fontRef idx="minor">
+              <a:schemeClr val="lt1"/>
+            </a:fontRef>
+          </p:style>
+          <p:txBody>
+            <a:bodyPr rtlCol="0" anchor="ctr"/>
+            <a:lstStyle/>
+            <a:p>
+              <a:pPr algn="ctr"/>
+              <a:endParaRPr kumimoji="1" lang="ja-JP" altLang="en-US"/>
+            </a:p>
+          </p:txBody>
+        </p:sp>
+        <p:cxnSp>
+          <p:nvCxnSpPr>
+            <p:cNvPr id="12" name="直線矢印コネクタ 11">
+              <a:extLst>
+                <a:ext uri="{FF2B5EF4-FFF2-40B4-BE49-F238E27FC236}">
+                  <a16:creationId xmlns:a16="http://schemas.microsoft.com/office/drawing/2014/main" id="{51820959-DB61-6AF1-7213-86CA9D33F816}"/>
+                </a:ext>
+              </a:extLst>
+            </p:cNvPr>
+            <p:cNvCxnSpPr>
+              <a:cxnSpLocks/>
+            </p:cNvCxnSpPr>
+            <p:nvPr/>
+          </p:nvCxnSpPr>
+          <p:spPr>
+            <a:xfrm>
+              <a:off x="7052261" y="4176926"/>
+              <a:ext cx="0" cy="2039366"/>
+            </a:xfrm>
+            <a:prstGeom prst="straightConnector1">
+              <a:avLst/>
+            </a:prstGeom>
+            <a:ln w="15875">
+              <a:solidFill>
+                <a:schemeClr val="tx1"/>
+              </a:solidFill>
+              <a:headEnd type="arrow" w="lg" len="lg"/>
+              <a:tailEnd type="arrow" w="lg" len="lg"/>
+            </a:ln>
+          </p:spPr>
+          <p:style>
+            <a:lnRef idx="1">
+              <a:schemeClr val="accent1"/>
+            </a:lnRef>
+            <a:fillRef idx="0">
+              <a:schemeClr val="accent1"/>
+            </a:fillRef>
+            <a:effectRef idx="0">
+              <a:schemeClr val="accent1"/>
+            </a:effectRef>
+            <a:fontRef idx="minor">
+              <a:schemeClr val="tx1"/>
+            </a:fontRef>
+          </p:style>
+        </p:cxnSp>
       </p:grpSp>
     </p:spTree>
     <p:extLst>

--- a/アイコン作成.pptx
+++ b/アイコン作成.pptx
@@ -259,7 +259,7 @@
           <a:p>
             <a:fld id="{1271BD87-DAA7-4386-9D7B-95369EC0824A}" type="datetimeFigureOut">
               <a:rPr kumimoji="1" lang="ja-JP" altLang="en-US" smtClean="0"/>
-              <a:t>2025/11/9</a:t>
+              <a:t>2025/11/16</a:t>
             </a:fld>
             <a:endParaRPr kumimoji="1" lang="ja-JP" altLang="en-US"/>
           </a:p>
@@ -489,7 +489,7 @@
           <a:p>
             <a:fld id="{1271BD87-DAA7-4386-9D7B-95369EC0824A}" type="datetimeFigureOut">
               <a:rPr kumimoji="1" lang="ja-JP" altLang="en-US" smtClean="0"/>
-              <a:t>2025/11/9</a:t>
+              <a:t>2025/11/16</a:t>
             </a:fld>
             <a:endParaRPr kumimoji="1" lang="ja-JP" altLang="en-US"/>
           </a:p>
@@ -729,7 +729,7 @@
           <a:p>
             <a:fld id="{1271BD87-DAA7-4386-9D7B-95369EC0824A}" type="datetimeFigureOut">
               <a:rPr kumimoji="1" lang="ja-JP" altLang="en-US" smtClean="0"/>
-              <a:t>2025/11/9</a:t>
+              <a:t>2025/11/16</a:t>
             </a:fld>
             <a:endParaRPr kumimoji="1" lang="ja-JP" altLang="en-US"/>
           </a:p>
@@ -959,7 +959,7 @@
           <a:p>
             <a:fld id="{1271BD87-DAA7-4386-9D7B-95369EC0824A}" type="datetimeFigureOut">
               <a:rPr kumimoji="1" lang="ja-JP" altLang="en-US" smtClean="0"/>
-              <a:t>2025/11/9</a:t>
+              <a:t>2025/11/16</a:t>
             </a:fld>
             <a:endParaRPr kumimoji="1" lang="ja-JP" altLang="en-US"/>
           </a:p>
@@ -1234,7 +1234,7 @@
           <a:p>
             <a:fld id="{1271BD87-DAA7-4386-9D7B-95369EC0824A}" type="datetimeFigureOut">
               <a:rPr kumimoji="1" lang="ja-JP" altLang="en-US" smtClean="0"/>
-              <a:t>2025/11/9</a:t>
+              <a:t>2025/11/16</a:t>
             </a:fld>
             <a:endParaRPr kumimoji="1" lang="ja-JP" altLang="en-US"/>
           </a:p>
@@ -1563,7 +1563,7 @@
           <a:p>
             <a:fld id="{1271BD87-DAA7-4386-9D7B-95369EC0824A}" type="datetimeFigureOut">
               <a:rPr kumimoji="1" lang="ja-JP" altLang="en-US" smtClean="0"/>
-              <a:t>2025/11/9</a:t>
+              <a:t>2025/11/16</a:t>
             </a:fld>
             <a:endParaRPr kumimoji="1" lang="ja-JP" altLang="en-US"/>
           </a:p>
@@ -2039,7 +2039,7 @@
           <a:p>
             <a:fld id="{1271BD87-DAA7-4386-9D7B-95369EC0824A}" type="datetimeFigureOut">
               <a:rPr kumimoji="1" lang="ja-JP" altLang="en-US" smtClean="0"/>
-              <a:t>2025/11/9</a:t>
+              <a:t>2025/11/16</a:t>
             </a:fld>
             <a:endParaRPr kumimoji="1" lang="ja-JP" altLang="en-US"/>
           </a:p>
@@ -2180,7 +2180,7 @@
           <a:p>
             <a:fld id="{1271BD87-DAA7-4386-9D7B-95369EC0824A}" type="datetimeFigureOut">
               <a:rPr kumimoji="1" lang="ja-JP" altLang="en-US" smtClean="0"/>
-              <a:t>2025/11/9</a:t>
+              <a:t>2025/11/16</a:t>
             </a:fld>
             <a:endParaRPr kumimoji="1" lang="ja-JP" altLang="en-US"/>
           </a:p>
@@ -2293,7 +2293,7 @@
           <a:p>
             <a:fld id="{1271BD87-DAA7-4386-9D7B-95369EC0824A}" type="datetimeFigureOut">
               <a:rPr kumimoji="1" lang="ja-JP" altLang="en-US" smtClean="0"/>
-              <a:t>2025/11/9</a:t>
+              <a:t>2025/11/16</a:t>
             </a:fld>
             <a:endParaRPr kumimoji="1" lang="ja-JP" altLang="en-US"/>
           </a:p>
@@ -2636,7 +2636,7 @@
           <a:p>
             <a:fld id="{1271BD87-DAA7-4386-9D7B-95369EC0824A}" type="datetimeFigureOut">
               <a:rPr kumimoji="1" lang="ja-JP" altLang="en-US" smtClean="0"/>
-              <a:t>2025/11/9</a:t>
+              <a:t>2025/11/16</a:t>
             </a:fld>
             <a:endParaRPr kumimoji="1" lang="ja-JP" altLang="en-US"/>
           </a:p>
@@ -2924,7 +2924,7 @@
           <a:p>
             <a:fld id="{1271BD87-DAA7-4386-9D7B-95369EC0824A}" type="datetimeFigureOut">
               <a:rPr kumimoji="1" lang="ja-JP" altLang="en-US" smtClean="0"/>
-              <a:t>2025/11/9</a:t>
+              <a:t>2025/11/16</a:t>
             </a:fld>
             <a:endParaRPr kumimoji="1" lang="ja-JP" altLang="en-US"/>
           </a:p>
@@ -3197,7 +3197,7 @@
           <a:p>
             <a:fld id="{1271BD87-DAA7-4386-9D7B-95369EC0824A}" type="datetimeFigureOut">
               <a:rPr kumimoji="1" lang="ja-JP" altLang="en-US" smtClean="0"/>
-              <a:t>2025/11/9</a:t>
+              <a:t>2025/11/16</a:t>
             </a:fld>
             <a:endParaRPr kumimoji="1" lang="ja-JP" altLang="en-US"/>
           </a:p>
@@ -3616,10 +3616,10 @@
       </p:grpSpPr>
       <p:pic>
         <p:nvPicPr>
-          <p:cNvPr id="36" name="図 35">
-            <a:extLst>
-              <a:ext uri="{FF2B5EF4-FFF2-40B4-BE49-F238E27FC236}">
-                <a16:creationId xmlns:a16="http://schemas.microsoft.com/office/drawing/2014/main" id="{BFEDD8B5-3372-5466-B991-6DD48A103E9F}"/>
+          <p:cNvPr id="13" name="図 12">
+            <a:extLst>
+              <a:ext uri="{FF2B5EF4-FFF2-40B4-BE49-F238E27FC236}">
+                <a16:creationId xmlns:a16="http://schemas.microsoft.com/office/drawing/2014/main" id="{0315A59D-519D-2D50-E1E2-C4867EF86F0F}"/>
               </a:ext>
             </a:extLst>
           </p:cNvPr>
@@ -3630,6 +3630,78 @@
         </p:nvPicPr>
         <p:blipFill>
           <a:blip r:embed="rId2">
+            <a:extLst>
+              <a:ext uri="{28A0092B-C50C-407E-A947-70E740481C1C}">
+                <a14:useLocalDpi xmlns:a14="http://schemas.microsoft.com/office/drawing/2010/main" val="0"/>
+              </a:ext>
+            </a:extLst>
+          </a:blip>
+          <a:stretch>
+            <a:fillRect/>
+          </a:stretch>
+        </p:blipFill>
+        <p:spPr>
+          <a:xfrm>
+            <a:off x="3841385" y="798234"/>
+            <a:ext cx="1294581" cy="1294581"/>
+          </a:xfrm>
+          <a:prstGeom prst="rect">
+            <a:avLst/>
+          </a:prstGeom>
+        </p:spPr>
+      </p:pic>
+      <p:pic>
+        <p:nvPicPr>
+          <p:cNvPr id="28" name="図 27">
+            <a:extLst>
+              <a:ext uri="{FF2B5EF4-FFF2-40B4-BE49-F238E27FC236}">
+                <a16:creationId xmlns:a16="http://schemas.microsoft.com/office/drawing/2014/main" id="{86936CED-1053-9811-C129-86F1487676A0}"/>
+              </a:ext>
+            </a:extLst>
+          </p:cNvPr>
+          <p:cNvPicPr>
+            <a:picLocks noChangeAspect="1"/>
+          </p:cNvPicPr>
+          <p:nvPr/>
+        </p:nvPicPr>
+        <p:blipFill>
+          <a:blip r:embed="rId3">
+            <a:extLst>
+              <a:ext uri="{28A0092B-C50C-407E-A947-70E740481C1C}">
+                <a14:useLocalDpi xmlns:a14="http://schemas.microsoft.com/office/drawing/2010/main" val="0"/>
+              </a:ext>
+            </a:extLst>
+          </a:blip>
+          <a:stretch>
+            <a:fillRect/>
+          </a:stretch>
+        </p:blipFill>
+        <p:spPr>
+          <a:xfrm>
+            <a:off x="3348311" y="2105929"/>
+            <a:ext cx="1294581" cy="1294581"/>
+          </a:xfrm>
+          <a:prstGeom prst="rect">
+            <a:avLst/>
+          </a:prstGeom>
+        </p:spPr>
+      </p:pic>
+      <p:pic>
+        <p:nvPicPr>
+          <p:cNvPr id="36" name="図 35">
+            <a:extLst>
+              <a:ext uri="{FF2B5EF4-FFF2-40B4-BE49-F238E27FC236}">
+                <a16:creationId xmlns:a16="http://schemas.microsoft.com/office/drawing/2014/main" id="{BFEDD8B5-3372-5466-B991-6DD48A103E9F}"/>
+              </a:ext>
+            </a:extLst>
+          </p:cNvPr>
+          <p:cNvPicPr>
+            <a:picLocks noChangeAspect="1"/>
+          </p:cNvPicPr>
+          <p:nvPr/>
+        </p:nvPicPr>
+        <p:blipFill>
+          <a:blip r:embed="rId4">
             <a:extLst>
               <a:ext uri="{28A0092B-C50C-407E-A947-70E740481C1C}">
                 <a14:useLocalDpi xmlns:a14="http://schemas.microsoft.com/office/drawing/2010/main" val="0"/>
@@ -3665,7 +3737,7 @@
           <p:nvPr/>
         </p:nvPicPr>
         <p:blipFill>
-          <a:blip r:embed="rId3">
+          <a:blip r:embed="rId5">
             <a:extLst>
               <a:ext uri="{28A0092B-C50C-407E-A947-70E740481C1C}">
                 <a14:useLocalDpi xmlns:a14="http://schemas.microsoft.com/office/drawing/2010/main" val="0"/>
@@ -3707,7 +3779,7 @@
             <a:avLst/>
           </a:prstGeom>
           <a:blipFill dpi="0" rotWithShape="1">
-            <a:blip r:embed="rId4">
+            <a:blip r:embed="rId6">
               <a:alphaModFix amt="28000"/>
             </a:blip>
             <a:srcRect/>
@@ -3756,7 +3828,7 @@
           <p:nvPr/>
         </p:nvPicPr>
         <p:blipFill>
-          <a:blip r:embed="rId5">
+          <a:blip r:embed="rId7">
             <a:extLst>
               <a:ext uri="{28A0092B-C50C-407E-A947-70E740481C1C}">
                 <a14:useLocalDpi xmlns:a14="http://schemas.microsoft.com/office/drawing/2010/main" val="0"/>
@@ -3779,10 +3851,10 @@
       </p:pic>
       <p:pic>
         <p:nvPicPr>
-          <p:cNvPr id="13" name="図 12">
-            <a:extLst>
-              <a:ext uri="{FF2B5EF4-FFF2-40B4-BE49-F238E27FC236}">
-                <a16:creationId xmlns:a16="http://schemas.microsoft.com/office/drawing/2014/main" id="{0315A59D-519D-2D50-E1E2-C4867EF86F0F}"/>
+          <p:cNvPr id="6" name="図 5">
+            <a:extLst>
+              <a:ext uri="{FF2B5EF4-FFF2-40B4-BE49-F238E27FC236}">
+                <a16:creationId xmlns:a16="http://schemas.microsoft.com/office/drawing/2014/main" id="{4B7B5AA0-4908-8D81-81E3-285C3137F642}"/>
               </a:ext>
             </a:extLst>
           </p:cNvPr>
@@ -3793,42 +3865,6 @@
         </p:nvPicPr>
         <p:blipFill>
           <a:blip r:embed="rId6">
-            <a:extLst>
-              <a:ext uri="{28A0092B-C50C-407E-A947-70E740481C1C}">
-                <a14:useLocalDpi xmlns:a14="http://schemas.microsoft.com/office/drawing/2010/main" val="0"/>
-              </a:ext>
-            </a:extLst>
-          </a:blip>
-          <a:stretch>
-            <a:fillRect/>
-          </a:stretch>
-        </p:blipFill>
-        <p:spPr>
-          <a:xfrm>
-            <a:off x="3594849" y="1592809"/>
-            <a:ext cx="1294581" cy="1294581"/>
-          </a:xfrm>
-          <a:prstGeom prst="rect">
-            <a:avLst/>
-          </a:prstGeom>
-        </p:spPr>
-      </p:pic>
-      <p:pic>
-        <p:nvPicPr>
-          <p:cNvPr id="6" name="図 5">
-            <a:extLst>
-              <a:ext uri="{FF2B5EF4-FFF2-40B4-BE49-F238E27FC236}">
-                <a16:creationId xmlns:a16="http://schemas.microsoft.com/office/drawing/2014/main" id="{4B7B5AA0-4908-8D81-81E3-285C3137F642}"/>
-              </a:ext>
-            </a:extLst>
-          </p:cNvPr>
-          <p:cNvPicPr>
-            <a:picLocks noChangeAspect="1"/>
-          </p:cNvPicPr>
-          <p:nvPr/>
-        </p:nvPicPr>
-        <p:blipFill>
-          <a:blip r:embed="rId4">
             <a:extLst>
               <a:ext uri="{28A0092B-C50C-407E-A947-70E740481C1C}">
                 <a14:useLocalDpi xmlns:a14="http://schemas.microsoft.com/office/drawing/2010/main" val="0"/>
@@ -3884,7 +3920,7 @@
             <p:nvPr/>
           </p:nvPicPr>
           <p:blipFill>
-            <a:blip r:embed="rId7">
+            <a:blip r:embed="rId8">
               <a:extLst>
                 <a:ext uri="{28A0092B-C50C-407E-A947-70E740481C1C}">
                   <a14:useLocalDpi xmlns:a14="http://schemas.microsoft.com/office/drawing/2010/main" val="0"/>
@@ -3921,7 +3957,7 @@
             <p:nvPr/>
           </p:nvPicPr>
           <p:blipFill>
-            <a:blip r:embed="rId7">
+            <a:blip r:embed="rId8">
               <a:extLst>
                 <a:ext uri="{28A0092B-C50C-407E-A947-70E740481C1C}">
                   <a14:useLocalDpi xmlns:a14="http://schemas.microsoft.com/office/drawing/2010/main" val="0"/>
@@ -3958,7 +3994,7 @@
             <p:nvPr/>
           </p:nvPicPr>
           <p:blipFill>
-            <a:blip r:embed="rId7">
+            <a:blip r:embed="rId8">
               <a:extLst>
                 <a:ext uri="{28A0092B-C50C-407E-A947-70E740481C1C}">
                   <a14:useLocalDpi xmlns:a14="http://schemas.microsoft.com/office/drawing/2010/main" val="0"/>
@@ -3983,10 +4019,10 @@
       </p:grpSp>
       <p:pic>
         <p:nvPicPr>
-          <p:cNvPr id="28" name="図 27">
-            <a:extLst>
-              <a:ext uri="{FF2B5EF4-FFF2-40B4-BE49-F238E27FC236}">
-                <a16:creationId xmlns:a16="http://schemas.microsoft.com/office/drawing/2014/main" id="{86936CED-1053-9811-C129-86F1487676A0}"/>
+          <p:cNvPr id="11" name="図 10">
+            <a:extLst>
+              <a:ext uri="{FF2B5EF4-FFF2-40B4-BE49-F238E27FC236}">
+                <a16:creationId xmlns:a16="http://schemas.microsoft.com/office/drawing/2014/main" id="{2D10F1D5-B216-1E80-C41F-A83DA43BA4F7}"/>
               </a:ext>
             </a:extLst>
           </p:cNvPr>
@@ -3996,7 +4032,7 @@
           <p:nvPr/>
         </p:nvPicPr>
         <p:blipFill>
-          <a:blip r:embed="rId8">
+          <a:blip r:embed="rId9">
             <a:extLst>
               <a:ext uri="{28A0092B-C50C-407E-A947-70E740481C1C}">
                 <a14:useLocalDpi xmlns:a14="http://schemas.microsoft.com/office/drawing/2010/main" val="0"/>
@@ -4009,7 +4045,7 @@
         </p:blipFill>
         <p:spPr>
           <a:xfrm>
-            <a:off x="2713165" y="2682829"/>
+            <a:off x="1888831" y="1525673"/>
             <a:ext cx="1294581" cy="1294581"/>
           </a:xfrm>
           <a:prstGeom prst="rect">
@@ -4019,10 +4055,10 @@
       </p:pic>
       <p:grpSp>
         <p:nvGrpSpPr>
-          <p:cNvPr id="40" name="グループ化 39">
-            <a:extLst>
-              <a:ext uri="{FF2B5EF4-FFF2-40B4-BE49-F238E27FC236}">
-                <a16:creationId xmlns:a16="http://schemas.microsoft.com/office/drawing/2014/main" id="{50CC3E41-58BE-D982-71EE-EA9DB60433EA}"/>
+          <p:cNvPr id="24" name="グループ化 23">
+            <a:extLst>
+              <a:ext uri="{FF2B5EF4-FFF2-40B4-BE49-F238E27FC236}">
+                <a16:creationId xmlns:a16="http://schemas.microsoft.com/office/drawing/2014/main" id="{63AEC27B-D748-F98B-76AB-0B631F8A81B9}"/>
               </a:ext>
             </a:extLst>
           </p:cNvPr>
@@ -4031,54 +4067,18 @@
         </p:nvGrpSpPr>
         <p:grpSpPr>
           <a:xfrm>
-            <a:off x="5300865" y="1775790"/>
-            <a:ext cx="2438401" cy="2438399"/>
-            <a:chOff x="5300865" y="1775790"/>
-            <a:chExt cx="2438401" cy="2438399"/>
+            <a:off x="1082396" y="2526217"/>
+            <a:ext cx="1294581" cy="1294581"/>
+            <a:chOff x="5431673" y="1913339"/>
+            <a:chExt cx="1294581" cy="1294581"/>
           </a:xfrm>
         </p:grpSpPr>
         <p:pic>
           <p:nvPicPr>
-            <p:cNvPr id="39" name="図 38">
+            <p:cNvPr id="22" name="図 21">
               <a:extLst>
                 <a:ext uri="{FF2B5EF4-FFF2-40B4-BE49-F238E27FC236}">
-                  <a16:creationId xmlns:a16="http://schemas.microsoft.com/office/drawing/2014/main" id="{F676F958-56F3-243B-A52B-F6B746D05D5B}"/>
-                </a:ext>
-              </a:extLst>
-            </p:cNvPr>
-            <p:cNvPicPr>
-              <a:picLocks noChangeAspect="1"/>
-            </p:cNvPicPr>
-            <p:nvPr/>
-          </p:nvPicPr>
-          <p:blipFill>
-            <a:blip r:embed="rId9">
-              <a:extLst>
-                <a:ext uri="{28A0092B-C50C-407E-A947-70E740481C1C}">
-                  <a14:useLocalDpi xmlns:a14="http://schemas.microsoft.com/office/drawing/2010/main" val="0"/>
-                </a:ext>
-              </a:extLst>
-            </a:blip>
-            <a:stretch>
-              <a:fillRect/>
-            </a:stretch>
-          </p:blipFill>
-          <p:spPr>
-            <a:xfrm>
-              <a:off x="6096000" y="2562610"/>
-              <a:ext cx="1414800" cy="1414800"/>
-            </a:xfrm>
-            <a:prstGeom prst="rect">
-              <a:avLst/>
-            </a:prstGeom>
-          </p:spPr>
-        </p:pic>
-        <p:pic>
-          <p:nvPicPr>
-            <p:cNvPr id="11" name="図 10">
-              <a:extLst>
-                <a:ext uri="{FF2B5EF4-FFF2-40B4-BE49-F238E27FC236}">
-                  <a16:creationId xmlns:a16="http://schemas.microsoft.com/office/drawing/2014/main" id="{2D10F1D5-B216-1E80-C41F-A83DA43BA4F7}"/>
+                  <a16:creationId xmlns:a16="http://schemas.microsoft.com/office/drawing/2014/main" id="{59623216-73B5-3F93-9C8D-B3A13AB78612}"/>
                 </a:ext>
               </a:extLst>
             </p:cNvPr>
@@ -4095,20 +4095,246 @@
                 </a:ext>
               </a:extLst>
             </a:blip>
+            <a:srcRect r="44515"/>
             <a:stretch>
               <a:fillRect/>
             </a:stretch>
           </p:blipFill>
           <p:spPr>
             <a:xfrm>
-              <a:off x="5444115" y="1918691"/>
-              <a:ext cx="1294581" cy="1294581"/>
+              <a:off x="5434851" y="1913339"/>
+              <a:ext cx="718300" cy="1294581"/>
             </a:xfrm>
             <a:prstGeom prst="rect">
               <a:avLst/>
             </a:prstGeom>
           </p:spPr>
         </p:pic>
+        <p:pic>
+          <p:nvPicPr>
+            <p:cNvPr id="23" name="図 22">
+              <a:extLst>
+                <a:ext uri="{FF2B5EF4-FFF2-40B4-BE49-F238E27FC236}">
+                  <a16:creationId xmlns:a16="http://schemas.microsoft.com/office/drawing/2014/main" id="{EB36E0F9-86B8-913C-05D3-3B94E7DEAC62}"/>
+                </a:ext>
+              </a:extLst>
+            </p:cNvPr>
+            <p:cNvPicPr>
+              <a:picLocks noChangeAspect="1"/>
+            </p:cNvPicPr>
+            <p:nvPr/>
+          </p:nvPicPr>
+          <p:blipFill>
+            <a:blip r:embed="rId10">
+              <a:extLst>
+                <a:ext uri="{28A0092B-C50C-407E-A947-70E740481C1C}">
+                  <a14:useLocalDpi xmlns:a14="http://schemas.microsoft.com/office/drawing/2010/main" val="0"/>
+                </a:ext>
+              </a:extLst>
+            </a:blip>
+            <a:srcRect b="45614"/>
+            <a:stretch>
+              <a:fillRect/>
+            </a:stretch>
+          </p:blipFill>
+          <p:spPr>
+            <a:xfrm>
+              <a:off x="5431673" y="1913340"/>
+              <a:ext cx="1294581" cy="704056"/>
+            </a:xfrm>
+            <a:prstGeom prst="rect">
+              <a:avLst/>
+            </a:prstGeom>
+          </p:spPr>
+        </p:pic>
+      </p:grpSp>
+      <p:pic>
+        <p:nvPicPr>
+          <p:cNvPr id="39" name="図 38">
+            <a:extLst>
+              <a:ext uri="{FF2B5EF4-FFF2-40B4-BE49-F238E27FC236}">
+                <a16:creationId xmlns:a16="http://schemas.microsoft.com/office/drawing/2014/main" id="{F676F958-56F3-243B-A52B-F6B746D05D5B}"/>
+              </a:ext>
+            </a:extLst>
+          </p:cNvPr>
+          <p:cNvPicPr>
+            <a:picLocks noChangeAspect="1"/>
+          </p:cNvPicPr>
+          <p:nvPr/>
+        </p:nvPicPr>
+        <p:blipFill>
+          <a:blip r:embed="rId11">
+            <a:extLst>
+              <a:ext uri="{28A0092B-C50C-407E-A947-70E740481C1C}">
+                <a14:useLocalDpi xmlns:a14="http://schemas.microsoft.com/office/drawing/2010/main" val="0"/>
+              </a:ext>
+            </a:extLst>
+          </a:blip>
+          <a:stretch>
+            <a:fillRect/>
+          </a:stretch>
+        </p:blipFill>
+        <p:spPr>
+          <a:xfrm>
+            <a:off x="10303169" y="2158912"/>
+            <a:ext cx="1414800" cy="1414800"/>
+          </a:xfrm>
+          <a:prstGeom prst="rect">
+            <a:avLst/>
+          </a:prstGeom>
+        </p:spPr>
+      </p:pic>
+      <p:grpSp>
+        <p:nvGrpSpPr>
+          <p:cNvPr id="31" name="グループ化 30">
+            <a:extLst>
+              <a:ext uri="{FF2B5EF4-FFF2-40B4-BE49-F238E27FC236}">
+                <a16:creationId xmlns:a16="http://schemas.microsoft.com/office/drawing/2014/main" id="{4ABBC7F8-C806-D4AE-F685-34CF888A09E1}"/>
+              </a:ext>
+            </a:extLst>
+          </p:cNvPr>
+          <p:cNvGrpSpPr/>
+          <p:nvPr/>
+        </p:nvGrpSpPr>
+        <p:grpSpPr>
+          <a:xfrm>
+            <a:off x="5300865" y="1775790"/>
+            <a:ext cx="2438401" cy="2438399"/>
+            <a:chOff x="5300865" y="1775790"/>
+            <a:chExt cx="2438401" cy="2438399"/>
+          </a:xfrm>
+        </p:grpSpPr>
+        <p:pic>
+          <p:nvPicPr>
+            <p:cNvPr id="30" name="図 29">
+              <a:extLst>
+                <a:ext uri="{FF2B5EF4-FFF2-40B4-BE49-F238E27FC236}">
+                  <a16:creationId xmlns:a16="http://schemas.microsoft.com/office/drawing/2014/main" id="{303B00E3-C6DE-AD83-955C-08CA97A7BB05}"/>
+                </a:ext>
+              </a:extLst>
+            </p:cNvPr>
+            <p:cNvPicPr>
+              <a:picLocks noChangeAspect="1"/>
+            </p:cNvPicPr>
+            <p:nvPr/>
+          </p:nvPicPr>
+          <p:blipFill>
+            <a:blip r:embed="rId12">
+              <a:extLst>
+                <a:ext uri="{28A0092B-C50C-407E-A947-70E740481C1C}">
+                  <a14:useLocalDpi xmlns:a14="http://schemas.microsoft.com/office/drawing/2010/main" val="0"/>
+                </a:ext>
+              </a:extLst>
+            </a:blip>
+            <a:stretch>
+              <a:fillRect/>
+            </a:stretch>
+          </p:blipFill>
+          <p:spPr>
+            <a:xfrm>
+              <a:off x="6093617" y="2562262"/>
+              <a:ext cx="1419564" cy="1419564"/>
+            </a:xfrm>
+            <a:prstGeom prst="rect">
+              <a:avLst/>
+            </a:prstGeom>
+          </p:spPr>
+        </p:pic>
+        <p:grpSp>
+          <p:nvGrpSpPr>
+            <p:cNvPr id="18" name="グループ化 17">
+              <a:extLst>
+                <a:ext uri="{FF2B5EF4-FFF2-40B4-BE49-F238E27FC236}">
+                  <a16:creationId xmlns:a16="http://schemas.microsoft.com/office/drawing/2014/main" id="{FF1C3961-5E10-C5AB-5D9B-A4E38C3410D3}"/>
+                </a:ext>
+              </a:extLst>
+            </p:cNvPr>
+            <p:cNvGrpSpPr/>
+            <p:nvPr/>
+          </p:nvGrpSpPr>
+          <p:grpSpPr>
+            <a:xfrm>
+              <a:off x="5431673" y="1914069"/>
+              <a:ext cx="1294581" cy="1294581"/>
+              <a:chOff x="5438027" y="1915318"/>
+              <a:chExt cx="1294581" cy="1294581"/>
+            </a:xfrm>
+          </p:grpSpPr>
+          <p:pic>
+            <p:nvPicPr>
+              <p:cNvPr id="15" name="図 14">
+                <a:extLst>
+                  <a:ext uri="{FF2B5EF4-FFF2-40B4-BE49-F238E27FC236}">
+                    <a16:creationId xmlns:a16="http://schemas.microsoft.com/office/drawing/2014/main" id="{631DF765-BE4B-53E8-E845-EBE12A554B58}"/>
+                  </a:ext>
+                </a:extLst>
+              </p:cNvPr>
+              <p:cNvPicPr>
+                <a:picLocks noChangeAspect="1"/>
+              </p:cNvPicPr>
+              <p:nvPr/>
+            </p:nvPicPr>
+            <p:blipFill>
+              <a:blip r:embed="rId13">
+                <a:extLst>
+                  <a:ext uri="{28A0092B-C50C-407E-A947-70E740481C1C}">
+                    <a14:useLocalDpi xmlns:a14="http://schemas.microsoft.com/office/drawing/2010/main" val="0"/>
+                  </a:ext>
+                </a:extLst>
+              </a:blip>
+              <a:srcRect l="-1" r="45232"/>
+              <a:stretch>
+                <a:fillRect/>
+              </a:stretch>
+            </p:blipFill>
+            <p:spPr>
+              <a:xfrm>
+                <a:off x="5444115" y="1915318"/>
+                <a:ext cx="709035" cy="1294581"/>
+              </a:xfrm>
+              <a:prstGeom prst="rect">
+                <a:avLst/>
+              </a:prstGeom>
+            </p:spPr>
+          </p:pic>
+          <p:pic>
+            <p:nvPicPr>
+              <p:cNvPr id="17" name="図 16">
+                <a:extLst>
+                  <a:ext uri="{FF2B5EF4-FFF2-40B4-BE49-F238E27FC236}">
+                    <a16:creationId xmlns:a16="http://schemas.microsoft.com/office/drawing/2014/main" id="{D850FDAF-1396-26C9-6C0B-1D47A0871D32}"/>
+                  </a:ext>
+                </a:extLst>
+              </p:cNvPr>
+              <p:cNvPicPr>
+                <a:picLocks noChangeAspect="1"/>
+              </p:cNvPicPr>
+              <p:nvPr/>
+            </p:nvPicPr>
+            <p:blipFill>
+              <a:blip r:embed="rId13">
+                <a:extLst>
+                  <a:ext uri="{28A0092B-C50C-407E-A947-70E740481C1C}">
+                    <a14:useLocalDpi xmlns:a14="http://schemas.microsoft.com/office/drawing/2010/main" val="0"/>
+                  </a:ext>
+                </a:extLst>
+              </a:blip>
+              <a:srcRect t="1" b="45616"/>
+              <a:stretch>
+                <a:fillRect/>
+              </a:stretch>
+            </p:blipFill>
+            <p:spPr>
+              <a:xfrm>
+                <a:off x="5438027" y="1915319"/>
+                <a:ext cx="1294581" cy="704056"/>
+              </a:xfrm>
+              <a:prstGeom prst="rect">
+                <a:avLst/>
+              </a:prstGeom>
+            </p:spPr>
+          </p:pic>
+        </p:grpSp>
         <p:sp>
           <p:nvSpPr>
             <p:cNvPr id="16" name="正方形/長方形 15">
@@ -4224,11 +4450,11 @@
             <p:nvPr/>
           </p:nvPicPr>
           <p:blipFill>
-            <a:blip r:embed="rId11">
+            <a:blip r:embed="rId14">
               <a:extLst>
                 <a:ext uri="{BEBA8EAE-BF5A-486C-A8C5-ECC9F3942E4B}">
                   <a14:imgProps xmlns:a14="http://schemas.microsoft.com/office/drawing/2010/main">
-                    <a14:imgLayer r:embed="rId12">
+                    <a14:imgLayer r:embed="rId15">
                       <a14:imgEffect>
                         <a14:sharpenSoften amount="-100000"/>
                       </a14:imgEffect>
